--- a/7_KI-Basismodule/KI-B3/KI-B3.2.4_Schaubild_Komplexität.pptx
+++ b/7_KI-Basismodule/KI-B3/KI-B3.2.4_Schaubild_Komplexität.pptx
@@ -5659,7 +5659,7 @@
             </a:pPr>
             <a:r>
               <a:rPr lang="de" dirty="0"/>
-              <a:t>Größe des Spielbretts	 	</a:t>
+              <a:t>Größe des Spielbretts:	 	</a:t>
             </a:r>
             <a:endParaRPr dirty="0"/>
           </a:p>
@@ -5675,7 +5675,7 @@
             </a:pPr>
             <a:r>
               <a:rPr lang="de" dirty="0"/>
-              <a:t>Möglichkeiten pro Zug (Ø)	</a:t>
+              <a:t>Möglichkeiten pro Zug (Ø):	</a:t>
             </a:r>
             <a:endParaRPr dirty="0"/>
           </a:p>
@@ -5691,7 +5691,7 @@
             </a:pPr>
             <a:r>
               <a:rPr lang="de" dirty="0"/>
-              <a:t>Länge des Spiels				</a:t>
+              <a:t>Länge des Spiels:				</a:t>
             </a:r>
             <a:endParaRPr dirty="0"/>
           </a:p>
@@ -5706,8 +5706,12 @@
               <a:buNone/>
             </a:pPr>
             <a:r>
+              <a:rPr lang="de"/>
+              <a:t>Mögliche Spielstellungen:</a:t>
+            </a:r>
+            <a:r>
               <a:rPr lang="de" dirty="0"/>
-              <a:t>Mögliche Spielstellungen				</a:t>
+              <a:t>			</a:t>
             </a:r>
             <a:endParaRPr dirty="0"/>
           </a:p>
